--- a/AIFinanceCrashcourse/slides/Module-05-VS-Code-Intro-and-Demo.pptx
+++ b/AIFinanceCrashcourse/slides/Module-05-VS-Code-Intro-and-Demo.pptx
@@ -4804,7 +4804,7 @@
                 </a:solidFill>
                 <a:latin typeface="Calibri"/>
               </a:rPr>
-              <a:t>ISBMS · PGDM 2025–27 · AGENTIC AI &amp; ADVANCED ANALYTICS IN FINANCE</a:t>
+              <a:t>AI IN FINANCE · THE COMPLETE CRASH COURSE</a:t>
             </a:r>
           </a:p>
         </p:txBody>
@@ -6247,7 +6247,7 @@
                 </a:solidFill>
                 <a:latin typeface="Calibri"/>
               </a:rPr>
-              <a:t>ISBMS · PGDM 2025–27 · AGENTIC AI &amp; ADVANCED ANALYTICS IN FINANCE</a:t>
+              <a:t>AI IN FINANCE · THE COMPLETE CRASH COURSE</a:t>
             </a:r>
           </a:p>
         </p:txBody>
